--- a/curso/pptx/S68.pptx
+++ b/curso/pptx/S68.pptx
@@ -472,426 +472,6 @@
     </a:lvl9pPr>
   </p:notesStyle>
 </p:notesMaster>
-</file>
-
-<file path=ppt/notesSlides/notesSlide1.xml><?xml version="1.0" encoding="utf-8"?>
-<p:notes xmlns:a="http://schemas.openxmlformats.org/drawingml/2006/main" xmlns:p="http://schemas.openxmlformats.org/presentationml/2006/main" xmlns:r="http://schemas.openxmlformats.org/officeDocument/2006/relationships">
-  <p:cSld>
-    <p:spTree>
-      <p:nvGrpSpPr>
-        <p:cNvPr id="1" name=""/>
-        <p:cNvGrpSpPr/>
-        <p:nvPr/>
-      </p:nvGrpSpPr>
-      <p:grpSpPr>
-        <a:xfrm>
-          <a:off x="0" y="0"/>
-          <a:ext cx="0" cy="0"/>
-          <a:chOff x="0" y="0"/>
-          <a:chExt cx="0" cy="0"/>
-        </a:xfrm>
-      </p:grpSpPr>
-      <p:sp>
-        <p:nvSpPr>
-          <p:cNvPr id="2" name="Slide Image Placeholder 1"/>
-          <p:cNvSpPr>
-            <a:spLocks noGrp="1"/>
-          </p:cNvSpPr>
-          <p:nvPr>
-            <p:ph type="sldImg" idx="2"/>
-          </p:nvPr>
-        </p:nvSpPr>
-        <p:spPr/>
-      </p:sp>
-      <p:sp>
-        <p:nvSpPr>
-          <p:cNvPr id="3" name="Notes Placeholder 2"/>
-          <p:cNvSpPr>
-            <a:spLocks noGrp="1"/>
-          </p:cNvSpPr>
-          <p:nvPr>
-            <p:ph type="body" idx="3" sz="quarter"/>
-          </p:nvPr>
-        </p:nvSpPr>
-        <p:spPr/>
-        <p:txBody>
-          <a:bodyPr/>
-          <a:lstStyle/>
-          <a:p>
-            <a:r>
-              <a:t>3 minutos. Sin apuntes. Es para recordar, no cuenta para nota.</a:t>
-            </a:r>
-          </a:p>
-        </p:txBody>
-      </p:sp>
-      <p:sp>
-        <p:nvSpPr>
-          <p:cNvPr id="4" name="Slide Number Placeholder 3"/>
-          <p:cNvSpPr>
-            <a:spLocks noGrp="1"/>
-          </p:cNvSpPr>
-          <p:nvPr>
-            <p:ph type="sldNum" idx="5" sz="quarter"/>
-          </p:nvPr>
-        </p:nvSpPr>
-        <p:spPr/>
-      </p:sp>
-    </p:spTree>
-  </p:cSld>
-  <p:clrMapOvr>
-    <a:masterClrMapping/>
-  </p:clrMapOvr>
-</p:notes>
-</file>
-
-<file path=ppt/notesSlides/notesSlide2.xml><?xml version="1.0" encoding="utf-8"?>
-<p:notes xmlns:a="http://schemas.openxmlformats.org/drawingml/2006/main" xmlns:p="http://schemas.openxmlformats.org/presentationml/2006/main" xmlns:r="http://schemas.openxmlformats.org/officeDocument/2006/relationships">
-  <p:cSld>
-    <p:spTree>
-      <p:nvGrpSpPr>
-        <p:cNvPr id="1" name=""/>
-        <p:cNvGrpSpPr/>
-        <p:nvPr/>
-      </p:nvGrpSpPr>
-      <p:grpSpPr>
-        <a:xfrm>
-          <a:off x="0" y="0"/>
-          <a:ext cx="0" cy="0"/>
-          <a:chOff x="0" y="0"/>
-          <a:chExt cx="0" cy="0"/>
-        </a:xfrm>
-      </p:grpSpPr>
-      <p:sp>
-        <p:nvSpPr>
-          <p:cNvPr id="2" name="Slide Image Placeholder 1"/>
-          <p:cNvSpPr>
-            <a:spLocks noGrp="1"/>
-          </p:cNvSpPr>
-          <p:nvPr>
-            <p:ph type="sldImg" idx="2"/>
-          </p:nvPr>
-        </p:nvSpPr>
-        <p:spPr/>
-      </p:sp>
-      <p:sp>
-        <p:nvSpPr>
-          <p:cNvPr id="3" name="Notes Placeholder 2"/>
-          <p:cNvSpPr>
-            <a:spLocks noGrp="1"/>
-          </p:cNvSpPr>
-          <p:nvPr>
-            <p:ph type="body" idx="3" sz="quarter"/>
-          </p:nvPr>
-        </p:nvSpPr>
-        <p:spPr/>
-        <p:txBody>
-          <a:bodyPr/>
-          <a:lstStyle/>
-          <a:p>
-            <a:r>
-              <a:t>3 minutos. Sin apuntes. Es para recordar, no cuenta para nota.</a:t>
-            </a:r>
-          </a:p>
-        </p:txBody>
-      </p:sp>
-      <p:sp>
-        <p:nvSpPr>
-          <p:cNvPr id="4" name="Slide Number Placeholder 3"/>
-          <p:cNvSpPr>
-            <a:spLocks noGrp="1"/>
-          </p:cNvSpPr>
-          <p:nvPr>
-            <p:ph type="sldNum" idx="5" sz="quarter"/>
-          </p:nvPr>
-        </p:nvSpPr>
-        <p:spPr/>
-      </p:sp>
-    </p:spTree>
-  </p:cSld>
-  <p:clrMapOvr>
-    <a:masterClrMapping/>
-  </p:clrMapOvr>
-</p:notes>
-</file>
-
-<file path=ppt/notesSlides/notesSlide3.xml><?xml version="1.0" encoding="utf-8"?>
-<p:notes xmlns:a="http://schemas.openxmlformats.org/drawingml/2006/main" xmlns:p="http://schemas.openxmlformats.org/presentationml/2006/main" xmlns:r="http://schemas.openxmlformats.org/officeDocument/2006/relationships">
-  <p:cSld>
-    <p:spTree>
-      <p:nvGrpSpPr>
-        <p:cNvPr id="1" name=""/>
-        <p:cNvGrpSpPr/>
-        <p:nvPr/>
-      </p:nvGrpSpPr>
-      <p:grpSpPr>
-        <a:xfrm>
-          <a:off x="0" y="0"/>
-          <a:ext cx="0" cy="0"/>
-          <a:chOff x="0" y="0"/>
-          <a:chExt cx="0" cy="0"/>
-        </a:xfrm>
-      </p:grpSpPr>
-      <p:sp>
-        <p:nvSpPr>
-          <p:cNvPr id="2" name="Slide Image Placeholder 1"/>
-          <p:cNvSpPr>
-            <a:spLocks noGrp="1"/>
-          </p:cNvSpPr>
-          <p:nvPr>
-            <p:ph type="sldImg" idx="2"/>
-          </p:nvPr>
-        </p:nvSpPr>
-        <p:spPr/>
-      </p:sp>
-      <p:sp>
-        <p:nvSpPr>
-          <p:cNvPr id="3" name="Notes Placeholder 2"/>
-          <p:cNvSpPr>
-            <a:spLocks noGrp="1"/>
-          </p:cNvSpPr>
-          <p:nvPr>
-            <p:ph type="body" idx="3" sz="quarter"/>
-          </p:nvPr>
-        </p:nvSpPr>
-        <p:spPr/>
-        <p:txBody>
-          <a:bodyPr/>
-          <a:lstStyle/>
-          <a:p>
-            <a:r>
-              <a:t>Nadie tiene que contestar: solo pensarlo.</a:t>
-            </a:r>
-          </a:p>
-        </p:txBody>
-      </p:sp>
-      <p:sp>
-        <p:nvSpPr>
-          <p:cNvPr id="4" name="Slide Number Placeholder 3"/>
-          <p:cNvSpPr>
-            <a:spLocks noGrp="1"/>
-          </p:cNvSpPr>
-          <p:nvPr>
-            <p:ph type="sldNum" idx="5" sz="quarter"/>
-          </p:nvPr>
-        </p:nvSpPr>
-        <p:spPr/>
-      </p:sp>
-    </p:spTree>
-  </p:cSld>
-  <p:clrMapOvr>
-    <a:masterClrMapping/>
-  </p:clrMapOvr>
-</p:notes>
-</file>
-
-<file path=ppt/notesSlides/notesSlide4.xml><?xml version="1.0" encoding="utf-8"?>
-<p:notes xmlns:a="http://schemas.openxmlformats.org/drawingml/2006/main" xmlns:p="http://schemas.openxmlformats.org/presentationml/2006/main" xmlns:r="http://schemas.openxmlformats.org/officeDocument/2006/relationships">
-  <p:cSld>
-    <p:spTree>
-      <p:nvGrpSpPr>
-        <p:cNvPr id="1" name=""/>
-        <p:cNvGrpSpPr/>
-        <p:nvPr/>
-      </p:nvGrpSpPr>
-      <p:grpSpPr>
-        <a:xfrm>
-          <a:off x="0" y="0"/>
-          <a:ext cx="0" cy="0"/>
-          <a:chOff x="0" y="0"/>
-          <a:chExt cx="0" cy="0"/>
-        </a:xfrm>
-      </p:grpSpPr>
-      <p:sp>
-        <p:nvSpPr>
-          <p:cNvPr id="2" name="Slide Image Placeholder 1"/>
-          <p:cNvSpPr>
-            <a:spLocks noGrp="1"/>
-          </p:cNvSpPr>
-          <p:nvPr>
-            <p:ph type="sldImg" idx="2"/>
-          </p:nvPr>
-        </p:nvSpPr>
-        <p:spPr/>
-      </p:sp>
-      <p:sp>
-        <p:nvSpPr>
-          <p:cNvPr id="3" name="Notes Placeholder 2"/>
-          <p:cNvSpPr>
-            <a:spLocks noGrp="1"/>
-          </p:cNvSpPr>
-          <p:nvPr>
-            <p:ph type="body" idx="3" sz="quarter"/>
-          </p:nvPr>
-        </p:nvSpPr>
-        <p:spPr/>
-        <p:txBody>
-          <a:bodyPr/>
-          <a:lstStyle/>
-          <a:p>
-            <a:r>
-              <a:t>Dejar unos segundos para que piensen la respuesta fácil antes de enseñar los pasos.</a:t>
-            </a:r>
-          </a:p>
-        </p:txBody>
-      </p:sp>
-      <p:sp>
-        <p:nvSpPr>
-          <p:cNvPr id="4" name="Slide Number Placeholder 3"/>
-          <p:cNvSpPr>
-            <a:spLocks noGrp="1"/>
-          </p:cNvSpPr>
-          <p:nvPr>
-            <p:ph type="sldNum" idx="5" sz="quarter"/>
-          </p:nvPr>
-        </p:nvSpPr>
-        <p:spPr/>
-      </p:sp>
-    </p:spTree>
-  </p:cSld>
-  <p:clrMapOvr>
-    <a:masterClrMapping/>
-  </p:clrMapOvr>
-</p:notes>
-</file>
-
-<file path=ppt/notesSlides/notesSlide5.xml><?xml version="1.0" encoding="utf-8"?>
-<p:notes xmlns:a="http://schemas.openxmlformats.org/drawingml/2006/main" xmlns:p="http://schemas.openxmlformats.org/presentationml/2006/main" xmlns:r="http://schemas.openxmlformats.org/officeDocument/2006/relationships">
-  <p:cSld>
-    <p:spTree>
-      <p:nvGrpSpPr>
-        <p:cNvPr id="1" name=""/>
-        <p:cNvGrpSpPr/>
-        <p:nvPr/>
-      </p:nvGrpSpPr>
-      <p:grpSpPr>
-        <a:xfrm>
-          <a:off x="0" y="0"/>
-          <a:ext cx="0" cy="0"/>
-          <a:chOff x="0" y="0"/>
-          <a:chExt cx="0" cy="0"/>
-        </a:xfrm>
-      </p:grpSpPr>
-      <p:sp>
-        <p:nvSpPr>
-          <p:cNvPr id="2" name="Slide Image Placeholder 1"/>
-          <p:cNvSpPr>
-            <a:spLocks noGrp="1"/>
-          </p:cNvSpPr>
-          <p:nvPr>
-            <p:ph type="sldImg" idx="2"/>
-          </p:nvPr>
-        </p:nvSpPr>
-        <p:spPr/>
-      </p:sp>
-      <p:sp>
-        <p:nvSpPr>
-          <p:cNvPr id="3" name="Notes Placeholder 2"/>
-          <p:cNvSpPr>
-            <a:spLocks noGrp="1"/>
-          </p:cNvSpPr>
-          <p:nvPr>
-            <p:ph type="body" idx="3" sz="quarter"/>
-          </p:nvPr>
-        </p:nvSpPr>
-        <p:spPr/>
-        <p:txBody>
-          <a:bodyPr/>
-          <a:lstStyle/>
-          <a:p>
-            <a:r>
-              <a:t>Dejar 2 minutos para que lo escriban. La diapositiva siguiente muestra el resumen.</a:t>
-            </a:r>
-          </a:p>
-        </p:txBody>
-      </p:sp>
-      <p:sp>
-        <p:nvSpPr>
-          <p:cNvPr id="4" name="Slide Number Placeholder 3"/>
-          <p:cNvSpPr>
-            <a:spLocks noGrp="1"/>
-          </p:cNvSpPr>
-          <p:nvPr>
-            <p:ph type="sldNum" idx="5" sz="quarter"/>
-          </p:nvPr>
-        </p:nvSpPr>
-        <p:spPr/>
-      </p:sp>
-    </p:spTree>
-  </p:cSld>
-  <p:clrMapOvr>
-    <a:masterClrMapping/>
-  </p:clrMapOvr>
-</p:notes>
-</file>
-
-<file path=ppt/notesSlides/notesSlide6.xml><?xml version="1.0" encoding="utf-8"?>
-<p:notes xmlns:a="http://schemas.openxmlformats.org/drawingml/2006/main" xmlns:p="http://schemas.openxmlformats.org/presentationml/2006/main" xmlns:r="http://schemas.openxmlformats.org/officeDocument/2006/relationships">
-  <p:cSld>
-    <p:spTree>
-      <p:nvGrpSpPr>
-        <p:cNvPr id="1" name=""/>
-        <p:cNvGrpSpPr/>
-        <p:nvPr/>
-      </p:nvGrpSpPr>
-      <p:grpSpPr>
-        <a:xfrm>
-          <a:off x="0" y="0"/>
-          <a:ext cx="0" cy="0"/>
-          <a:chOff x="0" y="0"/>
-          <a:chExt cx="0" cy="0"/>
-        </a:xfrm>
-      </p:grpSpPr>
-      <p:sp>
-        <p:nvSpPr>
-          <p:cNvPr id="2" name="Slide Image Placeholder 1"/>
-          <p:cNvSpPr>
-            <a:spLocks noGrp="1"/>
-          </p:cNvSpPr>
-          <p:nvPr>
-            <p:ph type="sldImg" idx="2"/>
-          </p:nvPr>
-        </p:nvSpPr>
-        <p:spPr/>
-      </p:sp>
-      <p:sp>
-        <p:nvSpPr>
-          <p:cNvPr id="3" name="Notes Placeholder 2"/>
-          <p:cNvSpPr>
-            <a:spLocks noGrp="1"/>
-          </p:cNvSpPr>
-          <p:nvPr>
-            <p:ph type="body" idx="3" sz="quarter"/>
-          </p:nvPr>
-        </p:nvSpPr>
-        <p:spPr/>
-        <p:txBody>
-          <a:bodyPr/>
-          <a:lstStyle/>
-          <a:p>
-            <a:r>
-              <a:t>Buscar: «huella de carbono de los alimentos» · «emisiones de CO2 por persona por país»</a:t>
-            </a:r>
-          </a:p>
-        </p:txBody>
-      </p:sp>
-      <p:sp>
-        <p:nvSpPr>
-          <p:cNvPr id="4" name="Slide Number Placeholder 3"/>
-          <p:cNvSpPr>
-            <a:spLocks noGrp="1"/>
-          </p:cNvSpPr>
-          <p:nvPr>
-            <p:ph type="sldNum" idx="5" sz="quarter"/>
-          </p:nvPr>
-        </p:nvSpPr>
-        <p:spPr/>
-      </p:sp>
-    </p:spTree>
-  </p:cSld>
-  <p:clrMapOvr>
-    <a:masterClrMapping/>
-  </p:clrMapOvr>
-</p:notes>
 </file>
 
 <file path=ppt/slideLayouts/slideLayout1.xml><?xml version="1.0" encoding="utf-8"?>

--- a/curso/pptx/S68.pptx
+++ b/curso/pptx/S68.pptx
@@ -4213,7 +4213,7 @@
                 </a:solidFill>
                 <a:latin typeface="Nunito Sans"/>
               </a:rPr>
-              <a:t>Kevin come tres hamburguesas de vaca a la semana. Leire, tres platos de lentejas. ¿Qué comida tiene más huella? (Ejemplo inventado.)</a:t>
+              <a:t>Un chico come tres hamburguesas de vaca a la semana. Una chica, tres platos de lentejas. ¿Qué comida tiene más huella? (Ejemplo inventado.)</a:t>
             </a:r>
           </a:p>
         </p:txBody>
@@ -4372,7 +4372,7 @@
                 </a:solidFill>
                 <a:latin typeface="Nunito Sans"/>
               </a:rPr>
-              <a:t> comemos. Es un dato, no un juicio sobre Kevin.</a:t>
+              <a:t> comemos. Es un dato, no un juicio sobre ese chico.</a:t>
             </a:r>
           </a:p>
         </p:txBody>
@@ -4885,7 +4885,7 @@
                 </a:solidFill>
                 <a:latin typeface="Nunito Sans"/>
               </a:rPr>
-              <a:t>En invierno, Iker elige tomates de un invernadero con calefacción cerca de casa, no de Almería. «Lo local siempre contamina menos», dice. (Ejemplo inventado.)</a:t>
+              <a:t>En invierno, un chico elige tomates de un invernadero con calefacción cerca de casa, no de Almería. «Lo local siempre contamina menos», dice. (Ejemplo inventado.)</a:t>
             </a:r>
           </a:p>
         </p:txBody>

--- a/curso/pptx/S68.pptx
+++ b/curso/pptx/S68.pptx
@@ -7464,7 +7464,7 @@
                 </a:solidFill>
                 <a:latin typeface="Fredoka"/>
               </a:rPr>
-              <a:t>Tres formas de comparar países (como en la sesión 37)</a:t>
+              <a:t>Tres formas de comparar países (como en la sesión 87)</a:t>
             </a:r>
           </a:p>
         </p:txBody>
